--- a/revenue-targets-dashboard/powerbi-background.pptx
+++ b/revenue-targets-dashboard/powerbi-background.pptx
@@ -7,9 +7,11 @@
   <p:sldIdLst>
     <p:sldId id="256" r:id="rId2"/>
     <p:sldId id="257" r:id="rId3"/>
+    <p:sldId id="258" r:id="rId4"/>
+    <p:sldId id="259" r:id="rId5"/>
   </p:sldIdLst>
   <p:notesMasterIdLst>
-    <p:notesMasterId r:id="rId4"/>
+    <p:notesMasterId r:id="rId6"/>
   </p:notesMasterIdLst>
   <p:sldSz cx="12192000" cy="6858000"/>
   <p:notesSz cx="6858000" cy="12192000"/>
@@ -108,14 +110,16 @@
   <p:extLst>
     <p:ext uri="{521415D9-36F7-43E2-AB2F-B90AF26B5E84}">
       <p14:sectionLst xmlns:p14="http://schemas.microsoft.com/office/powerpoint/2010/main">
-        <p14:section name="مستهدفات الإيرادات" id="{3da600de-d1a5-63bc-d065-f873d7dbc388}">
+        <p14:section name="مستهدفات الإيرادات" id="{a0712f68-1d78-4d39-87ed-ff797ffbc21b}">
           <p14:sldIdLst>
             <p14:sldId id="256"/>
+            <p14:sldId id="257"/>
           </p14:sldIdLst>
         </p14:section>
-        <p14:section name="المديونيات" id="{4beb5940-75c5-7439-7e75-0f365ce46585}">
+        <p14:section name="المديونيات" id="{c865e6e5-cf02-e67c-546b-a5ba88c734a8}">
           <p14:sldIdLst>
-            <p14:sldId id="257"/>
+            <p14:sldId id="258"/>
+            <p14:sldId id="259"/>
           </p14:sldIdLst>
         </p14:section>
       </p14:sectionLst>
@@ -610,7 +614,7 @@
           <a:p>
             <a:r>
               <a:rPr lang="en-US" dirty="0"/>
-              <a:t>حالة المديونيات — جميع القيم بالمليون ريال. الرسم يقارن رصيد المديونية بما تم سداده لكل تبويب في كل فترة.</a:t>
+              <a:t>تحليل مستهدفات الإيرادات — القيم بالمليون ريال، ونسب التغطية بالنسبة المئوية.</a:t>
             </a:r>
             <a:endParaRPr lang="en-US" dirty="0"/>
           </a:p>
@@ -634,6 +638,182 @@
             <a:fld id="{F7021451-1387-4CA6-816F-3879F97B5CBC}" type="slidenum">
               <a:rPr lang="en-US"/>
               <a:t>2</a:t>
+            </a:fld>
+            <a:endParaRPr lang="en-US"/>
+          </a:p>
+        </p:txBody>
+      </p:sp>
+    </p:spTree>
+    <p:extLst>
+      <p:ext uri="{BB962C8B-B14F-4D97-AF65-F5344CB8AC3E}">
+        <p14:creationId xmlns:p14="http://schemas.microsoft.com/office/powerpoint/2010/main" val="1024086991"/>
+      </p:ext>
+    </p:extLst>
+  </p:cSld>
+  <p:clrMapOvr>
+    <a:masterClrMapping/>
+  </p:clrMapOvr>
+</p:notes>
+</file>
+
+<file path=ppt/notesSlides/notesSlide3.xml><?xml version="1.0" encoding="utf-8"?>
+<p:notes xmlns:a="http://schemas.openxmlformats.org/drawingml/2006/main" xmlns:r="http://schemas.openxmlformats.org/officeDocument/2006/relationships" xmlns:p="http://schemas.openxmlformats.org/presentationml/2006/main">
+  <p:cSld>
+    <p:spTree>
+      <p:nvGrpSpPr>
+        <p:cNvPr id="1" name=""/>
+        <p:cNvGrpSpPr/>
+        <p:nvPr/>
+      </p:nvGrpSpPr>
+      <p:grpSpPr>
+        <a:xfrm>
+          <a:off x="0" y="0"/>
+          <a:ext cx="0" cy="0"/>
+          <a:chOff x="0" y="0"/>
+          <a:chExt cx="0" cy="0"/>
+        </a:xfrm>
+      </p:grpSpPr>
+      <p:sp>
+        <p:nvSpPr>
+          <p:cNvPr id="2" name="Slide Image Placeholder 1"/>
+          <p:cNvSpPr>
+            <a:spLocks noGrp="1" noRot="1" noChangeAspect="1"/>
+          </p:cNvSpPr>
+          <p:nvPr>
+            <p:ph type="sldImg"/>
+          </p:nvPr>
+        </p:nvSpPr>
+        <p:spPr/>
+      </p:sp>
+      <p:sp>
+        <p:nvSpPr>
+          <p:cNvPr id="3" name="Notes Placeholder 2"/>
+          <p:cNvSpPr>
+            <a:spLocks noGrp="1"/>
+          </p:cNvSpPr>
+          <p:nvPr>
+            <p:ph type="body" idx="1"/>
+          </p:nvPr>
+        </p:nvSpPr>
+        <p:spPr/>
+        <p:txBody>
+          <a:bodyPr/>
+          <a:lstStyle/>
+          <a:p>
+            <a:r>
+              <a:rPr lang="en-US" dirty="0"/>
+              <a:t>حالة المديونيات — جميع القيم بالمليون ريال. الرسم يقارن رصيد المديونية بما تم سداده لكل تبويب في كل فترة.</a:t>
+            </a:r>
+            <a:endParaRPr lang="en-US" dirty="0"/>
+          </a:p>
+        </p:txBody>
+      </p:sp>
+      <p:sp>
+        <p:nvSpPr>
+          <p:cNvPr id="4" name="Slide Number Placeholder 3"/>
+          <p:cNvSpPr>
+            <a:spLocks noGrp="1"/>
+          </p:cNvSpPr>
+          <p:nvPr>
+            <p:ph type="sldNum" sz="quarter" idx="10"/>
+          </p:nvPr>
+        </p:nvSpPr>
+        <p:spPr/>
+        <p:txBody>
+          <a:bodyPr/>
+          <a:lstStyle/>
+          <a:p>
+            <a:fld id="{F7021451-1387-4CA6-816F-3879F97B5CBC}" type="slidenum">
+              <a:rPr lang="en-US"/>
+              <a:t>3</a:t>
+            </a:fld>
+            <a:endParaRPr lang="en-US"/>
+          </a:p>
+        </p:txBody>
+      </p:sp>
+    </p:spTree>
+    <p:extLst>
+      <p:ext uri="{BB962C8B-B14F-4D97-AF65-F5344CB8AC3E}">
+        <p14:creationId xmlns:p14="http://schemas.microsoft.com/office/powerpoint/2010/main" val="1024086991"/>
+      </p:ext>
+    </p:extLst>
+  </p:cSld>
+  <p:clrMapOvr>
+    <a:masterClrMapping/>
+  </p:clrMapOvr>
+</p:notes>
+</file>
+
+<file path=ppt/notesSlides/notesSlide4.xml><?xml version="1.0" encoding="utf-8"?>
+<p:notes xmlns:a="http://schemas.openxmlformats.org/drawingml/2006/main" xmlns:r="http://schemas.openxmlformats.org/officeDocument/2006/relationships" xmlns:p="http://schemas.openxmlformats.org/presentationml/2006/main">
+  <p:cSld>
+    <p:spTree>
+      <p:nvGrpSpPr>
+        <p:cNvPr id="1" name=""/>
+        <p:cNvGrpSpPr/>
+        <p:nvPr/>
+      </p:nvGrpSpPr>
+      <p:grpSpPr>
+        <a:xfrm>
+          <a:off x="0" y="0"/>
+          <a:ext cx="0" cy="0"/>
+          <a:chOff x="0" y="0"/>
+          <a:chExt cx="0" cy="0"/>
+        </a:xfrm>
+      </p:grpSpPr>
+      <p:sp>
+        <p:nvSpPr>
+          <p:cNvPr id="2" name="Slide Image Placeholder 1"/>
+          <p:cNvSpPr>
+            <a:spLocks noGrp="1" noRot="1" noChangeAspect="1"/>
+          </p:cNvSpPr>
+          <p:nvPr>
+            <p:ph type="sldImg"/>
+          </p:nvPr>
+        </p:nvSpPr>
+        <p:spPr/>
+      </p:sp>
+      <p:sp>
+        <p:nvSpPr>
+          <p:cNvPr id="3" name="Notes Placeholder 2"/>
+          <p:cNvSpPr>
+            <a:spLocks noGrp="1"/>
+          </p:cNvSpPr>
+          <p:nvPr>
+            <p:ph type="body" idx="1"/>
+          </p:nvPr>
+        </p:nvSpPr>
+        <p:spPr/>
+        <p:txBody>
+          <a:bodyPr/>
+          <a:lstStyle/>
+          <a:p>
+            <a:r>
+              <a:rPr lang="en-US" dirty="0"/>
+              <a:t>تحليل المديونيات — جميع القيم بالمليون ريال.</a:t>
+            </a:r>
+            <a:endParaRPr lang="en-US" dirty="0"/>
+          </a:p>
+        </p:txBody>
+      </p:sp>
+      <p:sp>
+        <p:nvSpPr>
+          <p:cNvPr id="4" name="Slide Number Placeholder 3"/>
+          <p:cNvSpPr>
+            <a:spLocks noGrp="1"/>
+          </p:cNvSpPr>
+          <p:nvPr>
+            <p:ph type="sldNum" sz="quarter" idx="10"/>
+          </p:nvPr>
+        </p:nvSpPr>
+        <p:spPr/>
+        <p:txBody>
+          <a:bodyPr/>
+          <a:lstStyle/>
+          <a:p>
+            <a:fld id="{F7021451-1387-4CA6-816F-3879F97B5CBC}" type="slidenum">
+              <a:rPr lang="en-US"/>
+              <a:t>4</a:t>
             </a:fld>
             <a:endParaRPr lang="en-US"/>
           </a:p>
@@ -2786,7 +2966,7 @@
                   <a:schemeClr val="accent1"/>
                 </a:solidFill>
               </a:rPr>
-              <a:t>حالة المديونيات</a:t>
+              <a:t>تحليل مستهدفات الإيرادات</a:t>
             </a:r>
             <a:endParaRPr lang="en-US" sz="3000" dirty="0"/>
           </a:p>
@@ -2794,18 +2974,18 @@
       </p:sp>
       <p:sp>
         <p:nvSpPr>
-          <p:cNvPr id="3" name="kpi-1"/>
-          <p:cNvSpPr/>
-          <p:nvPr/>
-        </p:nvSpPr>
-        <p:spPr>
-          <a:xfrm>
-            <a:off x="9623146" y="1051560"/>
-            <a:ext cx="2108606" cy="1097280"/>
+          <p:cNvPr id="3" name="chart-billed"/>
+          <p:cNvSpPr/>
+          <p:nvPr/>
+        </p:nvSpPr>
+        <p:spPr>
+          <a:xfrm>
+            <a:off x="6208776" y="1051560"/>
+            <a:ext cx="5522976" cy="2651760"/>
           </a:xfrm>
           <a:prstGeom prst="roundRect">
             <a:avLst>
-              <a:gd name="adj" fmla="val 11667"/>
+              <a:gd name="adj" fmla="val 4828"/>
             </a:avLst>
           </a:prstGeom>
           <a:solidFill>
@@ -2829,8 +3009,8 @@
         </p:nvSpPr>
         <p:spPr>
           <a:xfrm>
-            <a:off x="11128248" y="1234440"/>
-            <a:ext cx="420624" cy="420624"/>
+            <a:off x="11119104" y="1216152"/>
+            <a:ext cx="384048" cy="384048"/>
           </a:xfrm>
           <a:prstGeom prst="ellipse">
             <a:avLst/>
@@ -2857,8 +3037,8 @@
         </p:blipFill>
         <p:spPr>
           <a:xfrm>
-            <a:off x="11241816" y="1348008"/>
-            <a:ext cx="193487" cy="193487"/>
+            <a:off x="11222797" y="1319845"/>
+            <a:ext cx="176662" cy="176662"/>
           </a:xfrm>
           <a:prstGeom prst="rect">
             <a:avLst/>
@@ -2873,8 +3053,8 @@
         </p:nvSpPr>
         <p:spPr>
           <a:xfrm>
-            <a:off x="9787738" y="1179576"/>
-            <a:ext cx="1285646" cy="512064"/>
+            <a:off x="6400800" y="1216152"/>
+            <a:ext cx="4608576" cy="384048"/>
           </a:xfrm>
           <a:prstGeom prst="rect">
             <a:avLst/>
@@ -2890,31 +3070,31 @@
               <a:buNone/>
             </a:pPr>
             <a:r>
-              <a:rPr lang="en-US" sz="1050" dirty="0">
-                <a:solidFill>
-                  <a:srgbClr val="6B7675"/>
-                </a:solidFill>
-              </a:rPr>
-              <a:t>رصيد المديونية بداية السنة الحالية</a:t>
-            </a:r>
-            <a:endParaRPr lang="en-US" sz="1050" dirty="0"/>
-          </a:p>
-        </p:txBody>
-      </p:sp>
-      <p:sp>
-        <p:nvSpPr>
-          <p:cNvPr id="7" name="kpi-2"/>
-          <p:cNvSpPr/>
-          <p:nvPr/>
-        </p:nvSpPr>
-        <p:spPr>
-          <a:xfrm>
-            <a:off x="7331659" y="1051560"/>
-            <a:ext cx="2108606" cy="1097280"/>
+              <a:rPr lang="en-US" sz="1500" b="1" dirty="0">
+                <a:solidFill>
+                  <a:srgbClr val="2D6A66"/>
+                </a:solidFill>
+              </a:rPr>
+              <a:t>الإيرادات المفوترة مقابل المستهدف</a:t>
+            </a:r>
+            <a:endParaRPr lang="en-US" sz="1500" dirty="0"/>
+          </a:p>
+        </p:txBody>
+      </p:sp>
+      <p:sp>
+        <p:nvSpPr>
+          <p:cNvPr id="7" name="chart-collected"/>
+          <p:cNvSpPr/>
+          <p:nvPr/>
+        </p:nvSpPr>
+        <p:spPr>
+          <a:xfrm>
+            <a:off x="457200" y="1051560"/>
+            <a:ext cx="5522976" cy="2651760"/>
           </a:xfrm>
           <a:prstGeom prst="roundRect">
             <a:avLst>
-              <a:gd name="adj" fmla="val 11667"/>
+              <a:gd name="adj" fmla="val 4828"/>
             </a:avLst>
           </a:prstGeom>
           <a:solidFill>
@@ -2938,8 +3118,8 @@
         </p:nvSpPr>
         <p:spPr>
           <a:xfrm>
-            <a:off x="8836762" y="1234440"/>
-            <a:ext cx="420624" cy="420624"/>
+            <a:off x="5367528" y="1216152"/>
+            <a:ext cx="384048" cy="384048"/>
           </a:xfrm>
           <a:prstGeom prst="ellipse">
             <a:avLst/>
@@ -2966,8 +3146,8 @@
         </p:blipFill>
         <p:spPr>
           <a:xfrm>
-            <a:off x="8950330" y="1348008"/>
-            <a:ext cx="193487" cy="193487"/>
+            <a:off x="5471221" y="1319845"/>
+            <a:ext cx="176662" cy="176662"/>
           </a:xfrm>
           <a:prstGeom prst="rect">
             <a:avLst/>
@@ -2982,8 +3162,8 @@
         </p:nvSpPr>
         <p:spPr>
           <a:xfrm>
-            <a:off x="7496251" y="1179576"/>
-            <a:ext cx="1285646" cy="512064"/>
+            <a:off x="649224" y="1216152"/>
+            <a:ext cx="4608576" cy="384048"/>
           </a:xfrm>
           <a:prstGeom prst="rect">
             <a:avLst/>
@@ -2999,31 +3179,31 @@
               <a:buNone/>
             </a:pPr>
             <a:r>
-              <a:rPr lang="en-US" sz="1050" dirty="0">
-                <a:solidFill>
-                  <a:srgbClr val="6B7675"/>
-                </a:solidFill>
-              </a:rPr>
-              <a:t>الملغي من المديونية في السنة الحالية</a:t>
-            </a:r>
-            <a:endParaRPr lang="en-US" sz="1050" dirty="0"/>
-          </a:p>
-        </p:txBody>
-      </p:sp>
-      <p:sp>
-        <p:nvSpPr>
-          <p:cNvPr id="11" name="kpi-3"/>
-          <p:cNvSpPr/>
-          <p:nvPr/>
-        </p:nvSpPr>
-        <p:spPr>
-          <a:xfrm>
-            <a:off x="5040173" y="1051560"/>
-            <a:ext cx="2108606" cy="1097280"/>
+              <a:rPr lang="en-US" sz="1500" b="1" dirty="0">
+                <a:solidFill>
+                  <a:srgbClr val="2D6A66"/>
+                </a:solidFill>
+              </a:rPr>
+              <a:t>إجمالي المحصل</a:t>
+            </a:r>
+            <a:endParaRPr lang="en-US" sz="1500" dirty="0"/>
+          </a:p>
+        </p:txBody>
+      </p:sp>
+      <p:sp>
+        <p:nvSpPr>
+          <p:cNvPr id="11" name="chart-coverage"/>
+          <p:cNvSpPr/>
+          <p:nvPr/>
+        </p:nvSpPr>
+        <p:spPr>
+          <a:xfrm>
+            <a:off x="6208776" y="3886200"/>
+            <a:ext cx="5522976" cy="2715768"/>
           </a:xfrm>
           <a:prstGeom prst="roundRect">
             <a:avLst>
-              <a:gd name="adj" fmla="val 11667"/>
+              <a:gd name="adj" fmla="val 4714"/>
             </a:avLst>
           </a:prstGeom>
           <a:solidFill>
@@ -3047,8 +3227,8 @@
         </p:nvSpPr>
         <p:spPr>
           <a:xfrm>
-            <a:off x="6545275" y="1234440"/>
-            <a:ext cx="420624" cy="420624"/>
+            <a:off x="11119104" y="4050792"/>
+            <a:ext cx="384048" cy="384048"/>
           </a:xfrm>
           <a:prstGeom prst="ellipse">
             <a:avLst/>
@@ -3075,8 +3255,8 @@
         </p:blipFill>
         <p:spPr>
           <a:xfrm>
-            <a:off x="6658844" y="1348008"/>
-            <a:ext cx="193487" cy="193487"/>
+            <a:off x="11222797" y="4154485"/>
+            <a:ext cx="176662" cy="176662"/>
           </a:xfrm>
           <a:prstGeom prst="rect">
             <a:avLst/>
@@ -3091,8 +3271,8 @@
         </p:nvSpPr>
         <p:spPr>
           <a:xfrm>
-            <a:off x="5204765" y="1179576"/>
-            <a:ext cx="1285646" cy="512064"/>
+            <a:off x="6400800" y="4050792"/>
+            <a:ext cx="4608576" cy="384048"/>
           </a:xfrm>
           <a:prstGeom prst="rect">
             <a:avLst/>
@@ -3108,35 +3288,35 @@
               <a:buNone/>
             </a:pPr>
             <a:r>
-              <a:rPr lang="en-US" sz="1050" dirty="0">
-                <a:solidFill>
-                  <a:srgbClr val="6B7675"/>
-                </a:solidFill>
-              </a:rPr>
-              <a:t>ما تم سداده من المديونية في السنة الحالية</a:t>
-            </a:r>
-            <a:endParaRPr lang="en-US" sz="1050" dirty="0"/>
-          </a:p>
-        </p:txBody>
-      </p:sp>
-      <p:sp>
-        <p:nvSpPr>
-          <p:cNvPr id="15" name="kpi-4"/>
-          <p:cNvSpPr/>
-          <p:nvPr/>
-        </p:nvSpPr>
-        <p:spPr>
-          <a:xfrm>
-            <a:off x="2748686" y="1051560"/>
-            <a:ext cx="2108606" cy="1097280"/>
+              <a:rPr lang="en-US" sz="1500" b="1" dirty="0">
+                <a:solidFill>
+                  <a:srgbClr val="2D6A66"/>
+                </a:solidFill>
+              </a:rPr>
+              <a:t>نسبة تغطية النفقات التشغيلية</a:t>
+            </a:r>
+            <a:endParaRPr lang="en-US" sz="1500" dirty="0"/>
+          </a:p>
+        </p:txBody>
+      </p:sp>
+      <p:sp>
+        <p:nvSpPr>
+          <p:cNvPr id="15" name="chart-opex-targets"/>
+          <p:cNvSpPr/>
+          <p:nvPr/>
+        </p:nvSpPr>
+        <p:spPr>
+          <a:xfrm>
+            <a:off x="457200" y="3886200"/>
+            <a:ext cx="5522976" cy="2715768"/>
           </a:xfrm>
           <a:prstGeom prst="roundRect">
             <a:avLst>
-              <a:gd name="adj" fmla="val 11667"/>
+              <a:gd name="adj" fmla="val 4714"/>
             </a:avLst>
           </a:prstGeom>
           <a:solidFill>
-            <a:srgbClr val="2D6A66"/>
+            <a:srgbClr val="FFFFFF"/>
           </a:solidFill>
           <a:ln/>
           <a:effectLst>
@@ -3156,14 +3336,14 @@
         </p:nvSpPr>
         <p:spPr>
           <a:xfrm>
-            <a:off x="4253789" y="1234440"/>
-            <a:ext cx="420624" cy="420624"/>
+            <a:off x="5367528" y="4050792"/>
+            <a:ext cx="384048" cy="384048"/>
           </a:xfrm>
           <a:prstGeom prst="ellipse">
             <a:avLst/>
           </a:prstGeom>
           <a:solidFill>
-            <a:srgbClr val="FFFFFF"/>
+            <a:srgbClr val="2D6A66"/>
           </a:solidFill>
           <a:ln/>
         </p:spPr>
@@ -3184,8 +3364,8 @@
         </p:blipFill>
         <p:spPr>
           <a:xfrm>
-            <a:off x="4367357" y="1348008"/>
-            <a:ext cx="193487" cy="193487"/>
+            <a:off x="5471221" y="4154485"/>
+            <a:ext cx="176662" cy="176662"/>
           </a:xfrm>
           <a:prstGeom prst="rect">
             <a:avLst/>
@@ -3200,8 +3380,8 @@
         </p:nvSpPr>
         <p:spPr>
           <a:xfrm>
-            <a:off x="2913278" y="1179576"/>
-            <a:ext cx="1285646" cy="512064"/>
+            <a:off x="649224" y="4050792"/>
+            <a:ext cx="4608576" cy="384048"/>
           </a:xfrm>
           <a:prstGeom prst="rect">
             <a:avLst/>
@@ -3217,26 +3397,89 @@
               <a:buNone/>
             </a:pPr>
             <a:r>
-              <a:rPr lang="en-US" sz="1050" dirty="0">
-                <a:solidFill>
-                  <a:srgbClr val="DCEBE8"/>
-                </a:solidFill>
-              </a:rPr>
-              <a:t>نسبة السداد</a:t>
-            </a:r>
-            <a:endParaRPr lang="en-US" sz="1050" dirty="0"/>
-          </a:p>
-        </p:txBody>
-      </p:sp>
-      <p:sp>
-        <p:nvSpPr>
-          <p:cNvPr id="19" name="kpi-5"/>
-          <p:cNvSpPr/>
-          <p:nvPr/>
-        </p:nvSpPr>
-        <p:spPr>
-          <a:xfrm>
-            <a:off x="457200" y="1051560"/>
+              <a:rPr lang="en-US" sz="1500" b="1" dirty="0">
+                <a:solidFill>
+                  <a:srgbClr val="2D6A66"/>
+                </a:solidFill>
+              </a:rPr>
+              <a:t>القيمة مقابل مستهدف النفقات التشغيلية</a:t>
+            </a:r>
+            <a:endParaRPr lang="en-US" sz="1500" dirty="0"/>
+          </a:p>
+        </p:txBody>
+      </p:sp>
+    </p:spTree>
+  </p:cSld>
+  <p:clrMapOvr>
+    <a:masterClrMapping/>
+  </p:clrMapOvr>
+</p:sld>
+</file>
+
+<file path=ppt/slides/slide3.xml><?xml version="1.0" encoding="utf-8"?>
+<p:sld xmlns:a="http://schemas.openxmlformats.org/drawingml/2006/main" xmlns:r="http://schemas.openxmlformats.org/officeDocument/2006/relationships" xmlns:p="http://schemas.openxmlformats.org/presentationml/2006/main">
+  <p:cSld name="Slide 3">
+    <p:spTree>
+      <p:nvGrpSpPr>
+        <p:cNvPr id="1" name=""/>
+        <p:cNvGrpSpPr/>
+        <p:nvPr/>
+      </p:nvGrpSpPr>
+      <p:grpSpPr>
+        <a:xfrm>
+          <a:off x="0" y="0"/>
+          <a:ext cx="0" cy="0"/>
+          <a:chOff x="0" y="0"/>
+          <a:chExt cx="0" cy="0"/>
+        </a:xfrm>
+      </p:grpSpPr>
+      <p:sp>
+        <p:nvSpPr>
+          <p:cNvPr id="2" name="Text 1"/>
+          <p:cNvSpPr/>
+          <p:nvPr>
+            <p:ph idx="102" type="title" hasCustomPrompt="1"/>
+          </p:nvPr>
+        </p:nvSpPr>
+        <p:spPr>
+          <a:xfrm>
+            <a:off x="5486400" y="274320"/>
+            <a:ext cx="6245352" cy="603504"/>
+          </a:xfrm>
+          <a:prstGeom prst="rect">
+            <a:avLst/>
+          </a:prstGeom>
+          <a:noFill/>
+          <a:ln/>
+        </p:spPr>
+        <p:txBody>
+          <a:bodyPr wrap="square" lIns="0" tIns="0" rIns="0" bIns="0" rtlCol="0" anchor="ctr"/>
+          <a:lstStyle/>
+          <a:p>
+            <a:pPr rtl="1" algn="r" indent="0" marL="0">
+              <a:buNone/>
+            </a:pPr>
+            <a:r>
+              <a:rPr lang="en-US" sz="3000" b="1" dirty="0">
+                <a:solidFill>
+                  <a:schemeClr val="accent1"/>
+                </a:solidFill>
+              </a:rPr>
+              <a:t>حالة المديونيات</a:t>
+            </a:r>
+            <a:endParaRPr lang="en-US" sz="3000" dirty="0"/>
+          </a:p>
+        </p:txBody>
+      </p:sp>
+      <p:sp>
+        <p:nvSpPr>
+          <p:cNvPr id="3" name="kpi-1"/>
+          <p:cNvSpPr/>
+          <p:nvPr/>
+        </p:nvSpPr>
+        <p:spPr>
+          <a:xfrm>
+            <a:off x="9623146" y="1051560"/>
             <a:ext cx="2108606" cy="1097280"/>
           </a:xfrm>
           <a:prstGeom prst="roundRect">
@@ -3259,6 +3502,442 @@
       </p:sp>
       <p:sp>
         <p:nvSpPr>
+          <p:cNvPr id="4" name="Shape 2"/>
+          <p:cNvSpPr/>
+          <p:nvPr/>
+        </p:nvSpPr>
+        <p:spPr>
+          <a:xfrm>
+            <a:off x="11128248" y="1234440"/>
+            <a:ext cx="420624" cy="420624"/>
+          </a:xfrm>
+          <a:prstGeom prst="ellipse">
+            <a:avLst/>
+          </a:prstGeom>
+          <a:solidFill>
+            <a:srgbClr val="2D6A66"/>
+          </a:solidFill>
+          <a:ln/>
+        </p:spPr>
+      </p:sp>
+      <p:pic>
+        <p:nvPicPr>
+          <p:cNvPr id="5" name="Image 0" descr="preencoded.png">    </p:cNvPr>
+          <p:cNvPicPr>
+            <a:picLocks noChangeAspect="1"/>
+          </p:cNvPicPr>
+          <p:nvPr/>
+        </p:nvPicPr>
+        <p:blipFill>
+          <a:blip r:embed="rId1"/>
+          <a:stretch>
+            <a:fillRect/>
+          </a:stretch>
+        </p:blipFill>
+        <p:spPr>
+          <a:xfrm>
+            <a:off x="11241816" y="1348008"/>
+            <a:ext cx="193487" cy="193487"/>
+          </a:xfrm>
+          <a:prstGeom prst="rect">
+            <a:avLst/>
+          </a:prstGeom>
+        </p:spPr>
+      </p:pic>
+      <p:sp>
+        <p:nvSpPr>
+          <p:cNvPr id="6" name="Text 3"/>
+          <p:cNvSpPr txBox="1"/>
+          <p:nvPr/>
+        </p:nvSpPr>
+        <p:spPr>
+          <a:xfrm>
+            <a:off x="9787738" y="1179576"/>
+            <a:ext cx="1285646" cy="512064"/>
+          </a:xfrm>
+          <a:prstGeom prst="rect">
+            <a:avLst/>
+          </a:prstGeom>
+          <a:noFill/>
+          <a:ln/>
+        </p:spPr>
+        <p:txBody>
+          <a:bodyPr wrap="square" lIns="0" tIns="0" rIns="0" bIns="0" rtlCol="0" anchor="ctr"/>
+          <a:lstStyle/>
+          <a:p>
+            <a:pPr rtl="1" algn="r" indent="0" marL="0">
+              <a:buNone/>
+            </a:pPr>
+            <a:r>
+              <a:rPr lang="en-US" sz="1050" dirty="0">
+                <a:solidFill>
+                  <a:srgbClr val="6B7675"/>
+                </a:solidFill>
+              </a:rPr>
+              <a:t>رصيد المديونية بداية السنة الحالية</a:t>
+            </a:r>
+            <a:endParaRPr lang="en-US" sz="1050" dirty="0"/>
+          </a:p>
+        </p:txBody>
+      </p:sp>
+      <p:sp>
+        <p:nvSpPr>
+          <p:cNvPr id="7" name="kpi-2"/>
+          <p:cNvSpPr/>
+          <p:nvPr/>
+        </p:nvSpPr>
+        <p:spPr>
+          <a:xfrm>
+            <a:off x="7331659" y="1051560"/>
+            <a:ext cx="2108606" cy="1097280"/>
+          </a:xfrm>
+          <a:prstGeom prst="roundRect">
+            <a:avLst>
+              <a:gd name="adj" fmla="val 11667"/>
+            </a:avLst>
+          </a:prstGeom>
+          <a:solidFill>
+            <a:srgbClr val="FFFFFF"/>
+          </a:solidFill>
+          <a:ln/>
+          <a:effectLst>
+            <a:outerShdw sx="100000" sy="100000" kx="0" ky="0" algn="bl" rotWithShape="0" blurRad="127000" dist="25400" dir="5400000">
+              <a:srgbClr val="1E2B2A">
+                <a:alpha val="10000"/>
+              </a:srgbClr>
+            </a:outerShdw>
+          </a:effectLst>
+        </p:spPr>
+      </p:sp>
+      <p:sp>
+        <p:nvSpPr>
+          <p:cNvPr id="8" name="Shape 5"/>
+          <p:cNvSpPr/>
+          <p:nvPr/>
+        </p:nvSpPr>
+        <p:spPr>
+          <a:xfrm>
+            <a:off x="8836762" y="1234440"/>
+            <a:ext cx="420624" cy="420624"/>
+          </a:xfrm>
+          <a:prstGeom prst="ellipse">
+            <a:avLst/>
+          </a:prstGeom>
+          <a:solidFill>
+            <a:srgbClr val="2D6A66"/>
+          </a:solidFill>
+          <a:ln/>
+        </p:spPr>
+      </p:sp>
+      <p:pic>
+        <p:nvPicPr>
+          <p:cNvPr id="9" name="Image 1" descr="preencoded.png">    </p:cNvPr>
+          <p:cNvPicPr>
+            <a:picLocks noChangeAspect="1"/>
+          </p:cNvPicPr>
+          <p:nvPr/>
+        </p:nvPicPr>
+        <p:blipFill>
+          <a:blip r:embed="rId2"/>
+          <a:stretch>
+            <a:fillRect/>
+          </a:stretch>
+        </p:blipFill>
+        <p:spPr>
+          <a:xfrm>
+            <a:off x="8950330" y="1348008"/>
+            <a:ext cx="193487" cy="193487"/>
+          </a:xfrm>
+          <a:prstGeom prst="rect">
+            <a:avLst/>
+          </a:prstGeom>
+        </p:spPr>
+      </p:pic>
+      <p:sp>
+        <p:nvSpPr>
+          <p:cNvPr id="10" name="Text 6"/>
+          <p:cNvSpPr txBox="1"/>
+          <p:nvPr/>
+        </p:nvSpPr>
+        <p:spPr>
+          <a:xfrm>
+            <a:off x="7496251" y="1179576"/>
+            <a:ext cx="1285646" cy="512064"/>
+          </a:xfrm>
+          <a:prstGeom prst="rect">
+            <a:avLst/>
+          </a:prstGeom>
+          <a:noFill/>
+          <a:ln/>
+        </p:spPr>
+        <p:txBody>
+          <a:bodyPr wrap="square" lIns="0" tIns="0" rIns="0" bIns="0" rtlCol="0" anchor="ctr"/>
+          <a:lstStyle/>
+          <a:p>
+            <a:pPr rtl="1" algn="r" indent="0" marL="0">
+              <a:buNone/>
+            </a:pPr>
+            <a:r>
+              <a:rPr lang="en-US" sz="1050" dirty="0">
+                <a:solidFill>
+                  <a:srgbClr val="6B7675"/>
+                </a:solidFill>
+              </a:rPr>
+              <a:t>الملغي من المديونية في السنة الحالية</a:t>
+            </a:r>
+            <a:endParaRPr lang="en-US" sz="1050" dirty="0"/>
+          </a:p>
+        </p:txBody>
+      </p:sp>
+      <p:sp>
+        <p:nvSpPr>
+          <p:cNvPr id="11" name="kpi-3"/>
+          <p:cNvSpPr/>
+          <p:nvPr/>
+        </p:nvSpPr>
+        <p:spPr>
+          <a:xfrm>
+            <a:off x="5040173" y="1051560"/>
+            <a:ext cx="2108606" cy="1097280"/>
+          </a:xfrm>
+          <a:prstGeom prst="roundRect">
+            <a:avLst>
+              <a:gd name="adj" fmla="val 11667"/>
+            </a:avLst>
+          </a:prstGeom>
+          <a:solidFill>
+            <a:srgbClr val="FFFFFF"/>
+          </a:solidFill>
+          <a:ln/>
+          <a:effectLst>
+            <a:outerShdw sx="100000" sy="100000" kx="0" ky="0" algn="bl" rotWithShape="0" blurRad="127000" dist="25400" dir="5400000">
+              <a:srgbClr val="1E2B2A">
+                <a:alpha val="10000"/>
+              </a:srgbClr>
+            </a:outerShdw>
+          </a:effectLst>
+        </p:spPr>
+      </p:sp>
+      <p:sp>
+        <p:nvSpPr>
+          <p:cNvPr id="12" name="Shape 8"/>
+          <p:cNvSpPr/>
+          <p:nvPr/>
+        </p:nvSpPr>
+        <p:spPr>
+          <a:xfrm>
+            <a:off x="6545275" y="1234440"/>
+            <a:ext cx="420624" cy="420624"/>
+          </a:xfrm>
+          <a:prstGeom prst="ellipse">
+            <a:avLst/>
+          </a:prstGeom>
+          <a:solidFill>
+            <a:srgbClr val="2D6A66"/>
+          </a:solidFill>
+          <a:ln/>
+        </p:spPr>
+      </p:sp>
+      <p:pic>
+        <p:nvPicPr>
+          <p:cNvPr id="13" name="Image 2" descr="preencoded.png">    </p:cNvPr>
+          <p:cNvPicPr>
+            <a:picLocks noChangeAspect="1"/>
+          </p:cNvPicPr>
+          <p:nvPr/>
+        </p:nvPicPr>
+        <p:blipFill>
+          <a:blip r:embed="rId3"/>
+          <a:stretch>
+            <a:fillRect/>
+          </a:stretch>
+        </p:blipFill>
+        <p:spPr>
+          <a:xfrm>
+            <a:off x="6658844" y="1348008"/>
+            <a:ext cx="193487" cy="193487"/>
+          </a:xfrm>
+          <a:prstGeom prst="rect">
+            <a:avLst/>
+          </a:prstGeom>
+        </p:spPr>
+      </p:pic>
+      <p:sp>
+        <p:nvSpPr>
+          <p:cNvPr id="14" name="Text 9"/>
+          <p:cNvSpPr txBox="1"/>
+          <p:nvPr/>
+        </p:nvSpPr>
+        <p:spPr>
+          <a:xfrm>
+            <a:off x="5204765" y="1179576"/>
+            <a:ext cx="1285646" cy="512064"/>
+          </a:xfrm>
+          <a:prstGeom prst="rect">
+            <a:avLst/>
+          </a:prstGeom>
+          <a:noFill/>
+          <a:ln/>
+        </p:spPr>
+        <p:txBody>
+          <a:bodyPr wrap="square" lIns="0" tIns="0" rIns="0" bIns="0" rtlCol="0" anchor="ctr"/>
+          <a:lstStyle/>
+          <a:p>
+            <a:pPr rtl="1" algn="r" indent="0" marL="0">
+              <a:buNone/>
+            </a:pPr>
+            <a:r>
+              <a:rPr lang="en-US" sz="1050" dirty="0">
+                <a:solidFill>
+                  <a:srgbClr val="6B7675"/>
+                </a:solidFill>
+              </a:rPr>
+              <a:t>ما تم سداده من المديونية في السنة الحالية</a:t>
+            </a:r>
+            <a:endParaRPr lang="en-US" sz="1050" dirty="0"/>
+          </a:p>
+        </p:txBody>
+      </p:sp>
+      <p:sp>
+        <p:nvSpPr>
+          <p:cNvPr id="15" name="kpi-4"/>
+          <p:cNvSpPr/>
+          <p:nvPr/>
+        </p:nvSpPr>
+        <p:spPr>
+          <a:xfrm>
+            <a:off x="2748686" y="1051560"/>
+            <a:ext cx="2108606" cy="1097280"/>
+          </a:xfrm>
+          <a:prstGeom prst="roundRect">
+            <a:avLst>
+              <a:gd name="adj" fmla="val 11667"/>
+            </a:avLst>
+          </a:prstGeom>
+          <a:solidFill>
+            <a:srgbClr val="2D6A66"/>
+          </a:solidFill>
+          <a:ln/>
+          <a:effectLst>
+            <a:outerShdw sx="100000" sy="100000" kx="0" ky="0" algn="bl" rotWithShape="0" blurRad="127000" dist="25400" dir="5400000">
+              <a:srgbClr val="1E2B2A">
+                <a:alpha val="10000"/>
+              </a:srgbClr>
+            </a:outerShdw>
+          </a:effectLst>
+        </p:spPr>
+      </p:sp>
+      <p:sp>
+        <p:nvSpPr>
+          <p:cNvPr id="16" name="Shape 11"/>
+          <p:cNvSpPr/>
+          <p:nvPr/>
+        </p:nvSpPr>
+        <p:spPr>
+          <a:xfrm>
+            <a:off x="4253789" y="1234440"/>
+            <a:ext cx="420624" cy="420624"/>
+          </a:xfrm>
+          <a:prstGeom prst="ellipse">
+            <a:avLst/>
+          </a:prstGeom>
+          <a:solidFill>
+            <a:srgbClr val="FFFFFF"/>
+          </a:solidFill>
+          <a:ln/>
+        </p:spPr>
+      </p:sp>
+      <p:pic>
+        <p:nvPicPr>
+          <p:cNvPr id="17" name="Image 3" descr="preencoded.png">    </p:cNvPr>
+          <p:cNvPicPr>
+            <a:picLocks noChangeAspect="1"/>
+          </p:cNvPicPr>
+          <p:nvPr/>
+        </p:nvPicPr>
+        <p:blipFill>
+          <a:blip r:embed="rId4"/>
+          <a:stretch>
+            <a:fillRect/>
+          </a:stretch>
+        </p:blipFill>
+        <p:spPr>
+          <a:xfrm>
+            <a:off x="4367357" y="1348008"/>
+            <a:ext cx="193487" cy="193487"/>
+          </a:xfrm>
+          <a:prstGeom prst="rect">
+            <a:avLst/>
+          </a:prstGeom>
+        </p:spPr>
+      </p:pic>
+      <p:sp>
+        <p:nvSpPr>
+          <p:cNvPr id="18" name="Text 12"/>
+          <p:cNvSpPr txBox="1"/>
+          <p:nvPr/>
+        </p:nvSpPr>
+        <p:spPr>
+          <a:xfrm>
+            <a:off x="2913278" y="1179576"/>
+            <a:ext cx="1285646" cy="512064"/>
+          </a:xfrm>
+          <a:prstGeom prst="rect">
+            <a:avLst/>
+          </a:prstGeom>
+          <a:noFill/>
+          <a:ln/>
+        </p:spPr>
+        <p:txBody>
+          <a:bodyPr wrap="square" lIns="0" tIns="0" rIns="0" bIns="0" rtlCol="0" anchor="ctr"/>
+          <a:lstStyle/>
+          <a:p>
+            <a:pPr rtl="1" algn="r" indent="0" marL="0">
+              <a:buNone/>
+            </a:pPr>
+            <a:r>
+              <a:rPr lang="en-US" sz="1050" dirty="0">
+                <a:solidFill>
+                  <a:srgbClr val="DCEBE8"/>
+                </a:solidFill>
+              </a:rPr>
+              <a:t>نسبة السداد</a:t>
+            </a:r>
+            <a:endParaRPr lang="en-US" sz="1050" dirty="0"/>
+          </a:p>
+        </p:txBody>
+      </p:sp>
+      <p:sp>
+        <p:nvSpPr>
+          <p:cNvPr id="19" name="kpi-5"/>
+          <p:cNvSpPr/>
+          <p:nvPr/>
+        </p:nvSpPr>
+        <p:spPr>
+          <a:xfrm>
+            <a:off x="457200" y="1051560"/>
+            <a:ext cx="2108606" cy="1097280"/>
+          </a:xfrm>
+          <a:prstGeom prst="roundRect">
+            <a:avLst>
+              <a:gd name="adj" fmla="val 11667"/>
+            </a:avLst>
+          </a:prstGeom>
+          <a:solidFill>
+            <a:srgbClr val="FFFFFF"/>
+          </a:solidFill>
+          <a:ln/>
+          <a:effectLst>
+            <a:outerShdw sx="100000" sy="100000" kx="0" ky="0" algn="bl" rotWithShape="0" blurRad="127000" dist="25400" dir="5400000">
+              <a:srgbClr val="1E2B2A">
+                <a:alpha val="10000"/>
+              </a:srgbClr>
+            </a:outerShdw>
+          </a:effectLst>
+        </p:spPr>
+      </p:sp>
+      <p:sp>
+        <p:nvSpPr>
           <p:cNvPr id="20" name="Shape 14"/>
           <p:cNvSpPr/>
           <p:nvPr/>
@@ -4088,6 +4767,646 @@
               <a:t>إجمالي المتبقي</a:t>
             </a:r>
             <a:endParaRPr lang="en-US" sz="1050" dirty="0"/>
+          </a:p>
+        </p:txBody>
+      </p:sp>
+    </p:spTree>
+  </p:cSld>
+  <p:clrMapOvr>
+    <a:masterClrMapping/>
+  </p:clrMapOvr>
+</p:sld>
+</file>
+
+<file path=ppt/slides/slide4.xml><?xml version="1.0" encoding="utf-8"?>
+<p:sld xmlns:a="http://schemas.openxmlformats.org/drawingml/2006/main" xmlns:r="http://schemas.openxmlformats.org/officeDocument/2006/relationships" xmlns:p="http://schemas.openxmlformats.org/presentationml/2006/main">
+  <p:cSld name="Slide 4">
+    <p:spTree>
+      <p:nvGrpSpPr>
+        <p:cNvPr id="1" name=""/>
+        <p:cNvGrpSpPr/>
+        <p:nvPr/>
+      </p:nvGrpSpPr>
+      <p:grpSpPr>
+        <a:xfrm>
+          <a:off x="0" y="0"/>
+          <a:ext cx="0" cy="0"/>
+          <a:chOff x="0" y="0"/>
+          <a:chExt cx="0" cy="0"/>
+        </a:xfrm>
+      </p:grpSpPr>
+      <p:sp>
+        <p:nvSpPr>
+          <p:cNvPr id="2" name="Text 1"/>
+          <p:cNvSpPr/>
+          <p:nvPr>
+            <p:ph idx="102" type="title" hasCustomPrompt="1"/>
+          </p:nvPr>
+        </p:nvSpPr>
+        <p:spPr>
+          <a:xfrm>
+            <a:off x="5486400" y="274320"/>
+            <a:ext cx="6245352" cy="603504"/>
+          </a:xfrm>
+          <a:prstGeom prst="rect">
+            <a:avLst/>
+          </a:prstGeom>
+          <a:noFill/>
+          <a:ln/>
+        </p:spPr>
+        <p:txBody>
+          <a:bodyPr wrap="square" lIns="0" tIns="0" rIns="0" bIns="0" rtlCol="0" anchor="ctr"/>
+          <a:lstStyle/>
+          <a:p>
+            <a:pPr rtl="1" algn="r" indent="0" marL="0">
+              <a:buNone/>
+            </a:pPr>
+            <a:r>
+              <a:rPr lang="en-US" sz="3000" b="1" dirty="0">
+                <a:solidFill>
+                  <a:schemeClr val="accent1"/>
+                </a:solidFill>
+              </a:rPr>
+              <a:t>تحليل المديونيات</a:t>
+            </a:r>
+            <a:endParaRPr lang="en-US" sz="3000" dirty="0"/>
+          </a:p>
+        </p:txBody>
+      </p:sp>
+      <p:sp>
+        <p:nvSpPr>
+          <p:cNvPr id="3" name="chart-debt-flow"/>
+          <p:cNvSpPr/>
+          <p:nvPr/>
+        </p:nvSpPr>
+        <p:spPr>
+          <a:xfrm>
+            <a:off x="6208776" y="1051560"/>
+            <a:ext cx="5522976" cy="2651760"/>
+          </a:xfrm>
+          <a:prstGeom prst="roundRect">
+            <a:avLst>
+              <a:gd name="adj" fmla="val 4828"/>
+            </a:avLst>
+          </a:prstGeom>
+          <a:solidFill>
+            <a:srgbClr val="FFFFFF"/>
+          </a:solidFill>
+          <a:ln/>
+          <a:effectLst>
+            <a:outerShdw sx="100000" sy="100000" kx="0" ky="0" algn="bl" rotWithShape="0" blurRad="127000" dist="25400" dir="5400000">
+              <a:srgbClr val="1E2B2A">
+                <a:alpha val="10000"/>
+              </a:srgbClr>
+            </a:outerShdw>
+          </a:effectLst>
+        </p:spPr>
+      </p:sp>
+      <p:sp>
+        <p:nvSpPr>
+          <p:cNvPr id="4" name="Shape 2"/>
+          <p:cNvSpPr/>
+          <p:nvPr/>
+        </p:nvSpPr>
+        <p:spPr>
+          <a:xfrm>
+            <a:off x="11119104" y="1216152"/>
+            <a:ext cx="384048" cy="384048"/>
+          </a:xfrm>
+          <a:prstGeom prst="ellipse">
+            <a:avLst/>
+          </a:prstGeom>
+          <a:solidFill>
+            <a:srgbClr val="2D6A66"/>
+          </a:solidFill>
+          <a:ln/>
+        </p:spPr>
+      </p:sp>
+      <p:pic>
+        <p:nvPicPr>
+          <p:cNvPr id="5" name="Image 0" descr="preencoded.png">    </p:cNvPr>
+          <p:cNvPicPr>
+            <a:picLocks noChangeAspect="1"/>
+          </p:cNvPicPr>
+          <p:nvPr/>
+        </p:nvPicPr>
+        <p:blipFill>
+          <a:blip r:embed="rId1"/>
+          <a:stretch>
+            <a:fillRect/>
+          </a:stretch>
+        </p:blipFill>
+        <p:spPr>
+          <a:xfrm>
+            <a:off x="11222797" y="1319845"/>
+            <a:ext cx="176662" cy="176662"/>
+          </a:xfrm>
+          <a:prstGeom prst="rect">
+            <a:avLst/>
+          </a:prstGeom>
+        </p:spPr>
+      </p:pic>
+      <p:sp>
+        <p:nvSpPr>
+          <p:cNvPr id="6" name="Text 3"/>
+          <p:cNvSpPr txBox="1"/>
+          <p:nvPr/>
+        </p:nvSpPr>
+        <p:spPr>
+          <a:xfrm>
+            <a:off x="6400800" y="1216152"/>
+            <a:ext cx="4608576" cy="384048"/>
+          </a:xfrm>
+          <a:prstGeom prst="rect">
+            <a:avLst/>
+          </a:prstGeom>
+          <a:noFill/>
+          <a:ln/>
+        </p:spPr>
+        <p:txBody>
+          <a:bodyPr wrap="square" lIns="0" tIns="0" rIns="0" bIns="0" rtlCol="0" anchor="ctr"/>
+          <a:lstStyle/>
+          <a:p>
+            <a:pPr rtl="1" algn="r" indent="0" marL="0">
+              <a:buNone/>
+            </a:pPr>
+            <a:r>
+              <a:rPr lang="en-US" sz="1500" b="1" dirty="0">
+                <a:solidFill>
+                  <a:srgbClr val="2D6A66"/>
+                </a:solidFill>
+              </a:rPr>
+              <a:t>حركة المديونية في السنة الحالية</a:t>
+            </a:r>
+            <a:endParaRPr lang="en-US" sz="1500" dirty="0"/>
+          </a:p>
+        </p:txBody>
+      </p:sp>
+      <p:sp>
+        <p:nvSpPr>
+          <p:cNvPr id="7" name="chart-pay-ratio"/>
+          <p:cNvSpPr/>
+          <p:nvPr/>
+        </p:nvSpPr>
+        <p:spPr>
+          <a:xfrm>
+            <a:off x="457200" y="1051560"/>
+            <a:ext cx="5522976" cy="2651760"/>
+          </a:xfrm>
+          <a:prstGeom prst="roundRect">
+            <a:avLst>
+              <a:gd name="adj" fmla="val 4828"/>
+            </a:avLst>
+          </a:prstGeom>
+          <a:solidFill>
+            <a:srgbClr val="FFFFFF"/>
+          </a:solidFill>
+          <a:ln/>
+          <a:effectLst>
+            <a:outerShdw sx="100000" sy="100000" kx="0" ky="0" algn="bl" rotWithShape="0" blurRad="127000" dist="25400" dir="5400000">
+              <a:srgbClr val="1E2B2A">
+                <a:alpha val="10000"/>
+              </a:srgbClr>
+            </a:outerShdw>
+          </a:effectLst>
+        </p:spPr>
+      </p:sp>
+      <p:sp>
+        <p:nvSpPr>
+          <p:cNvPr id="8" name="Shape 5"/>
+          <p:cNvSpPr/>
+          <p:nvPr/>
+        </p:nvSpPr>
+        <p:spPr>
+          <a:xfrm>
+            <a:off x="5367528" y="1216152"/>
+            <a:ext cx="384048" cy="384048"/>
+          </a:xfrm>
+          <a:prstGeom prst="ellipse">
+            <a:avLst/>
+          </a:prstGeom>
+          <a:solidFill>
+            <a:srgbClr val="2D6A66"/>
+          </a:solidFill>
+          <a:ln/>
+        </p:spPr>
+      </p:sp>
+      <p:pic>
+        <p:nvPicPr>
+          <p:cNvPr id="9" name="Image 1" descr="preencoded.png">    </p:cNvPr>
+          <p:cNvPicPr>
+            <a:picLocks noChangeAspect="1"/>
+          </p:cNvPicPr>
+          <p:nvPr/>
+        </p:nvPicPr>
+        <p:blipFill>
+          <a:blip r:embed="rId2"/>
+          <a:stretch>
+            <a:fillRect/>
+          </a:stretch>
+        </p:blipFill>
+        <p:spPr>
+          <a:xfrm>
+            <a:off x="5471221" y="1319845"/>
+            <a:ext cx="176662" cy="176662"/>
+          </a:xfrm>
+          <a:prstGeom prst="rect">
+            <a:avLst/>
+          </a:prstGeom>
+        </p:spPr>
+      </p:pic>
+      <p:sp>
+        <p:nvSpPr>
+          <p:cNvPr id="10" name="Text 6"/>
+          <p:cNvSpPr txBox="1"/>
+          <p:nvPr/>
+        </p:nvSpPr>
+        <p:spPr>
+          <a:xfrm>
+            <a:off x="649224" y="1216152"/>
+            <a:ext cx="4608576" cy="384048"/>
+          </a:xfrm>
+          <a:prstGeom prst="rect">
+            <a:avLst/>
+          </a:prstGeom>
+          <a:noFill/>
+          <a:ln/>
+        </p:spPr>
+        <p:txBody>
+          <a:bodyPr wrap="square" lIns="0" tIns="0" rIns="0" bIns="0" rtlCol="0" anchor="ctr"/>
+          <a:lstStyle/>
+          <a:p>
+            <a:pPr rtl="1" algn="r" indent="0" marL="0">
+              <a:buNone/>
+            </a:pPr>
+            <a:r>
+              <a:rPr lang="en-US" sz="1500" b="1" dirty="0">
+                <a:solidFill>
+                  <a:srgbClr val="2D6A66"/>
+                </a:solidFill>
+              </a:rPr>
+              <a:t>نسبة السداد</a:t>
+            </a:r>
+            <a:endParaRPr lang="en-US" sz="1500" dirty="0"/>
+          </a:p>
+        </p:txBody>
+      </p:sp>
+      <p:sp>
+        <p:nvSpPr>
+          <p:cNvPr id="11" name="Shape 7"/>
+          <p:cNvSpPr/>
+          <p:nvPr/>
+        </p:nvSpPr>
+        <p:spPr>
+          <a:xfrm>
+            <a:off x="1069848" y="1851660"/>
+            <a:ext cx="1563624" cy="1563624"/>
+          </a:xfrm>
+          <a:prstGeom prst="ellipse">
+            <a:avLst/>
+          </a:prstGeom>
+          <a:solidFill>
+            <a:srgbClr val="FFFFFF"/>
+          </a:solidFill>
+          <a:ln w="228600">
+            <a:solidFill>
+              <a:srgbClr val="E4E9E8"/>
+            </a:solidFill>
+            <a:prstDash val="solid"/>
+          </a:ln>
+        </p:spPr>
+      </p:sp>
+      <p:sp>
+        <p:nvSpPr>
+          <p:cNvPr id="12" name="Shape 8"/>
+          <p:cNvSpPr/>
+          <p:nvPr/>
+        </p:nvSpPr>
+        <p:spPr>
+          <a:xfrm>
+            <a:off x="5669280" y="2011680"/>
+            <a:ext cx="128016" cy="128016"/>
+          </a:xfrm>
+          <a:prstGeom prst="roundRect">
+            <a:avLst>
+              <a:gd name="adj" fmla="val 21429"/>
+            </a:avLst>
+          </a:prstGeom>
+          <a:solidFill>
+            <a:srgbClr val="2D6A66"/>
+          </a:solidFill>
+          <a:ln/>
+        </p:spPr>
+      </p:sp>
+      <p:sp>
+        <p:nvSpPr>
+          <p:cNvPr id="13" name="Text 9"/>
+          <p:cNvSpPr txBox="1"/>
+          <p:nvPr/>
+        </p:nvSpPr>
+        <p:spPr>
+          <a:xfrm>
+            <a:off x="3108960" y="1947672"/>
+            <a:ext cx="2468880" cy="256032"/>
+          </a:xfrm>
+          <a:prstGeom prst="rect">
+            <a:avLst/>
+          </a:prstGeom>
+          <a:noFill/>
+          <a:ln/>
+        </p:spPr>
+        <p:txBody>
+          <a:bodyPr wrap="square" lIns="0" tIns="0" rIns="0" bIns="0" rtlCol="0" anchor="ctr"/>
+          <a:lstStyle/>
+          <a:p>
+            <a:pPr rtl="1" algn="r" indent="0" marL="0">
+              <a:buNone/>
+            </a:pPr>
+            <a:r>
+              <a:rPr lang="en-US" sz="1100" dirty="0">
+                <a:solidFill>
+                  <a:srgbClr val="6B7675"/>
+                </a:solidFill>
+              </a:rPr>
+              <a:t>ما تم سداده من المديونية في السنة الحالية</a:t>
+            </a:r>
+            <a:endParaRPr lang="en-US" sz="1100" dirty="0"/>
+          </a:p>
+        </p:txBody>
+      </p:sp>
+      <p:sp>
+        <p:nvSpPr>
+          <p:cNvPr id="14" name="Shape 10"/>
+          <p:cNvSpPr/>
+          <p:nvPr/>
+        </p:nvSpPr>
+        <p:spPr>
+          <a:xfrm>
+            <a:off x="5669280" y="2926080"/>
+            <a:ext cx="128016" cy="128016"/>
+          </a:xfrm>
+          <a:prstGeom prst="roundRect">
+            <a:avLst>
+              <a:gd name="adj" fmla="val 21429"/>
+            </a:avLst>
+          </a:prstGeom>
+          <a:solidFill>
+            <a:srgbClr val="8A8F8E"/>
+          </a:solidFill>
+          <a:ln/>
+        </p:spPr>
+      </p:sp>
+      <p:sp>
+        <p:nvSpPr>
+          <p:cNvPr id="15" name="Text 11"/>
+          <p:cNvSpPr txBox="1"/>
+          <p:nvPr/>
+        </p:nvSpPr>
+        <p:spPr>
+          <a:xfrm>
+            <a:off x="3108960" y="2862072"/>
+            <a:ext cx="2468880" cy="256032"/>
+          </a:xfrm>
+          <a:prstGeom prst="rect">
+            <a:avLst/>
+          </a:prstGeom>
+          <a:noFill/>
+          <a:ln/>
+        </p:spPr>
+        <p:txBody>
+          <a:bodyPr wrap="square" lIns="0" tIns="0" rIns="0" bIns="0" rtlCol="0" anchor="ctr"/>
+          <a:lstStyle/>
+          <a:p>
+            <a:pPr rtl="1" algn="r" indent="0" marL="0">
+              <a:buNone/>
+            </a:pPr>
+            <a:r>
+              <a:rPr lang="en-US" sz="1100" dirty="0">
+                <a:solidFill>
+                  <a:srgbClr val="6B7675"/>
+                </a:solidFill>
+              </a:rPr>
+              <a:t>المتبقي من المديونية</a:t>
+            </a:r>
+            <a:endParaRPr lang="en-US" sz="1100" dirty="0"/>
+          </a:p>
+        </p:txBody>
+      </p:sp>
+      <p:sp>
+        <p:nvSpPr>
+          <p:cNvPr id="16" name="chart-periods"/>
+          <p:cNvSpPr/>
+          <p:nvPr/>
+        </p:nvSpPr>
+        <p:spPr>
+          <a:xfrm>
+            <a:off x="6208776" y="3886200"/>
+            <a:ext cx="5522976" cy="2715768"/>
+          </a:xfrm>
+          <a:prstGeom prst="roundRect">
+            <a:avLst>
+              <a:gd name="adj" fmla="val 4714"/>
+            </a:avLst>
+          </a:prstGeom>
+          <a:solidFill>
+            <a:srgbClr val="FFFFFF"/>
+          </a:solidFill>
+          <a:ln/>
+          <a:effectLst>
+            <a:outerShdw sx="100000" sy="100000" kx="0" ky="0" algn="bl" rotWithShape="0" blurRad="127000" dist="25400" dir="5400000">
+              <a:srgbClr val="1E2B2A">
+                <a:alpha val="10000"/>
+              </a:srgbClr>
+            </a:outerShdw>
+          </a:effectLst>
+        </p:spPr>
+      </p:sp>
+      <p:sp>
+        <p:nvSpPr>
+          <p:cNvPr id="17" name="Shape 13"/>
+          <p:cNvSpPr/>
+          <p:nvPr/>
+        </p:nvSpPr>
+        <p:spPr>
+          <a:xfrm>
+            <a:off x="11119104" y="4050792"/>
+            <a:ext cx="384048" cy="384048"/>
+          </a:xfrm>
+          <a:prstGeom prst="ellipse">
+            <a:avLst/>
+          </a:prstGeom>
+          <a:solidFill>
+            <a:srgbClr val="2D6A66"/>
+          </a:solidFill>
+          <a:ln/>
+        </p:spPr>
+      </p:sp>
+      <p:pic>
+        <p:nvPicPr>
+          <p:cNvPr id="18" name="Image 2" descr="preencoded.png">    </p:cNvPr>
+          <p:cNvPicPr>
+            <a:picLocks noChangeAspect="1"/>
+          </p:cNvPicPr>
+          <p:nvPr/>
+        </p:nvPicPr>
+        <p:blipFill>
+          <a:blip r:embed="rId3"/>
+          <a:stretch>
+            <a:fillRect/>
+          </a:stretch>
+        </p:blipFill>
+        <p:spPr>
+          <a:xfrm>
+            <a:off x="11222797" y="4154485"/>
+            <a:ext cx="176662" cy="176662"/>
+          </a:xfrm>
+          <a:prstGeom prst="rect">
+            <a:avLst/>
+          </a:prstGeom>
+        </p:spPr>
+      </p:pic>
+      <p:sp>
+        <p:nvSpPr>
+          <p:cNvPr id="19" name="Text 14"/>
+          <p:cNvSpPr txBox="1"/>
+          <p:nvPr/>
+        </p:nvSpPr>
+        <p:spPr>
+          <a:xfrm>
+            <a:off x="6400800" y="4050792"/>
+            <a:ext cx="4608576" cy="384048"/>
+          </a:xfrm>
+          <a:prstGeom prst="rect">
+            <a:avLst/>
+          </a:prstGeom>
+          <a:noFill/>
+          <a:ln/>
+        </p:spPr>
+        <p:txBody>
+          <a:bodyPr wrap="square" lIns="0" tIns="0" rIns="0" bIns="0" rtlCol="0" anchor="ctr"/>
+          <a:lstStyle/>
+          <a:p>
+            <a:pPr rtl="1" algn="r" indent="0" marL="0">
+              <a:buNone/>
+            </a:pPr>
+            <a:r>
+              <a:rPr lang="en-US" sz="1500" b="1" dirty="0">
+                <a:solidFill>
+                  <a:srgbClr val="2D6A66"/>
+                </a:solidFill>
+              </a:rPr>
+              <a:t>مقارنة الفترتين</a:t>
+            </a:r>
+            <a:endParaRPr lang="en-US" sz="1500" dirty="0"/>
+          </a:p>
+        </p:txBody>
+      </p:sp>
+      <p:sp>
+        <p:nvSpPr>
+          <p:cNvPr id="20" name="chart-tabs"/>
+          <p:cNvSpPr/>
+          <p:nvPr/>
+        </p:nvSpPr>
+        <p:spPr>
+          <a:xfrm>
+            <a:off x="457200" y="3886200"/>
+            <a:ext cx="5522976" cy="2715768"/>
+          </a:xfrm>
+          <a:prstGeom prst="roundRect">
+            <a:avLst>
+              <a:gd name="adj" fmla="val 4714"/>
+            </a:avLst>
+          </a:prstGeom>
+          <a:solidFill>
+            <a:srgbClr val="FFFFFF"/>
+          </a:solidFill>
+          <a:ln/>
+          <a:effectLst>
+            <a:outerShdw sx="100000" sy="100000" kx="0" ky="0" algn="bl" rotWithShape="0" blurRad="127000" dist="25400" dir="5400000">
+              <a:srgbClr val="1E2B2A">
+                <a:alpha val="10000"/>
+              </a:srgbClr>
+            </a:outerShdw>
+          </a:effectLst>
+        </p:spPr>
+      </p:sp>
+      <p:sp>
+        <p:nvSpPr>
+          <p:cNvPr id="21" name="Shape 16"/>
+          <p:cNvSpPr/>
+          <p:nvPr/>
+        </p:nvSpPr>
+        <p:spPr>
+          <a:xfrm>
+            <a:off x="5367528" y="4050792"/>
+            <a:ext cx="384048" cy="384048"/>
+          </a:xfrm>
+          <a:prstGeom prst="ellipse">
+            <a:avLst/>
+          </a:prstGeom>
+          <a:solidFill>
+            <a:srgbClr val="2D6A66"/>
+          </a:solidFill>
+          <a:ln/>
+        </p:spPr>
+      </p:sp>
+      <p:pic>
+        <p:nvPicPr>
+          <p:cNvPr id="22" name="Image 3" descr="preencoded.png">    </p:cNvPr>
+          <p:cNvPicPr>
+            <a:picLocks noChangeAspect="1"/>
+          </p:cNvPicPr>
+          <p:nvPr/>
+        </p:nvPicPr>
+        <p:blipFill>
+          <a:blip r:embed="rId4"/>
+          <a:stretch>
+            <a:fillRect/>
+          </a:stretch>
+        </p:blipFill>
+        <p:spPr>
+          <a:xfrm>
+            <a:off x="5471221" y="4154485"/>
+            <a:ext cx="176662" cy="176662"/>
+          </a:xfrm>
+          <a:prstGeom prst="rect">
+            <a:avLst/>
+          </a:prstGeom>
+        </p:spPr>
+      </p:pic>
+      <p:sp>
+        <p:nvSpPr>
+          <p:cNvPr id="23" name="Text 17"/>
+          <p:cNvSpPr txBox="1"/>
+          <p:nvPr/>
+        </p:nvSpPr>
+        <p:spPr>
+          <a:xfrm>
+            <a:off x="649224" y="4050792"/>
+            <a:ext cx="4608576" cy="384048"/>
+          </a:xfrm>
+          <a:prstGeom prst="rect">
+            <a:avLst/>
+          </a:prstGeom>
+          <a:noFill/>
+          <a:ln/>
+        </p:spPr>
+        <p:txBody>
+          <a:bodyPr wrap="square" lIns="0" tIns="0" rIns="0" bIns="0" rtlCol="0" anchor="ctr"/>
+          <a:lstStyle/>
+          <a:p>
+            <a:pPr rtl="1" algn="r" indent="0" marL="0">
+              <a:buNone/>
+            </a:pPr>
+            <a:r>
+              <a:rPr lang="en-US" sz="1500" b="1" dirty="0">
+                <a:solidFill>
+                  <a:srgbClr val="2D6A66"/>
+                </a:solidFill>
+              </a:rPr>
+              <a:t>رصيد المديونية حسب التبويب</a:t>
+            </a:r>
+            <a:endParaRPr lang="en-US" sz="1500" dirty="0"/>
           </a:p>
         </p:txBody>
       </p:sp>
